--- a/course/高校实验室安全/课件/003_高校实验室安全规范与检查.pptx
+++ b/course/高校实验室安全/课件/003_高校实验室安全规范与检查.pptx
@@ -529,12 +529,6 @@
               <a:t>规范的具体条文以现行文本为准；本课介绍其主要内容，各项要求在后续各章中展开。</a:t>
             </a:r>
           </a:p>
-          <a:p/>
-          <a:p>
-            <a:r>
-              <a:t>来源：补充知识点（依据《高等学校实验室安全规范》，原视频未涉及）</a:t>
-            </a:r>
-          </a:p>
         </p:txBody>
       </p:sp>
       <p:sp>
@@ -755,12 +749,6 @@
               <a:t>此外，规范对危险化学品、病原微生物、放射性物质和射线装置、机电设备、特种设备、激光、废弃物等各类危险源的管理分别提出要求。这些要求就是本课程第 3 章至第 14 章的主要内容。</a:t>
             </a:r>
           </a:p>
-          <a:p/>
-          <a:p>
-            <a:r>
-              <a:t>来源：补充知识点（依据《高等学校实验室安全规范》，原视频未涉及）</a:t>
-            </a:r>
-          </a:p>
         </p:txBody>
       </p:sp>
       <p:sp>
@@ -841,12 +829,6 @@
               <a:t>分级的具体标准、级数和颜色以本校规定为准。实验内容、危险源发生变化时，实验室的级别和信息牌也要相应调整。</a:t>
             </a:r>
           </a:p>
-          <a:p/>
-          <a:p>
-            <a:r>
-              <a:t>来源：合并了 1 个原知识点，最佳讲解取自 Acids, Bases &amp; Solvents Safety 11（详见 来源.tsv）</a:t>
-            </a:r>
-          </a:p>
         </p:txBody>
       </p:sp>
       <p:sp>
@@ -927,12 +909,6 @@
               <a:t>当用量增加、操作条件改变或换到新场所时，要重新评估风险并相应调整措施。</a:t>
             </a:r>
           </a:p>
-          <a:p/>
-          <a:p>
-            <a:r>
-              <a:t>来源：合并了 1 个原知识点，最佳讲解取自 Acids, Bases &amp; Solvents Safety 11（详见 来源.tsv）</a:t>
-            </a:r>
-          </a:p>
         </p:txBody>
       </p:sp>
       <p:sp>
@@ -1013,12 +989,6 @@
               <a:t>信息牌必须准确、及时：新进了危险化学品或开展新的危险性实验，要对照化学品安全技术说明书（SDS）更新危险类别和防护要求；责任人、电话变更要立即更换。信息过期或不全的信息牌，等于没有挂。</a:t>
             </a:r>
           </a:p>
-          <a:p/>
-          <a:p>
-            <a:r>
-              <a:t>来源：合并了 1 个原知识点，最佳讲解取自 Microbiology Biosafety 23（详见 来源.tsv）</a:t>
-            </a:r>
-          </a:p>
         </p:txBody>
       </p:sp>
       <p:sp>
@@ -1094,12 +1064,6 @@
               <a:t>但承诺的意义在于落实到每天的行动：进门时按要求穿好实验服、戴好防护用品，查看仪器使用记录和交接信息；实验中遵守规程；离开前检查并关闭水、电、气，关好门窗，按本实验室的离室检查清单逐项确认。</a:t>
             </a:r>
           </a:p>
-          <a:p/>
-          <a:p>
-            <a:r>
-              <a:t>来源：合并了 1 个原知识点，最佳讲解取自 Laboratory Ergonomics &amp; RSI 34（详见 来源.tsv）</a:t>
-            </a:r>
-          </a:p>
         </p:txBody>
       </p:sp>
       <p:sp>
@@ -1180,12 +1144,6 @@
               <a:t>检查中问题较集中的往往是：危险化学品的存放和台账、气瓶的固定和管理、消防器材和疏散通道、用电线路和插座、废弃物的收集存放、个人防护等。平时对照项目表逐项自查，是发现问题、避免“临检突击”的最有效办法。</a:t>
             </a:r>
           </a:p>
-          <a:p/>
-          <a:p>
-            <a:r>
-              <a:t>来源：补充知识点（依据教育部高校实验室安全检查项目表，原视频未涉及）</a:t>
-            </a:r>
-          </a:p>
         </p:txBody>
       </p:sp>
       <p:sp>
@@ -1264,12 +1222,6 @@
           <a:p>
             <a:r>
               <a:t>检查发现的问题要登记、整改并复查；存在重大隐患的，要立即停止相关实验或停用相关设备，整改合格后才能恢复。日常自查、隐患分级和整改闭环的具体方法在第 5 课讲解。</a:t>
-            </a:r>
-          </a:p>
-          <a:p/>
-          <a:p>
-            <a:r>
-              <a:t>来源：合并了 1 个原知识点，最佳讲解取自 Acids, Bases &amp; Solvents Safety 02（详见 来源.tsv）</a:t>
             </a:r>
           </a:p>
         </p:txBody>
